--- a/crapi-mcp/presentation.pptx
+++ b/crapi-mcp/presentation.pptx
@@ -1408,6 +1408,27 @@
               </a:rPr>
               <a:t>github.com/mcropsey</a:t>
             </a:r>
+            <a:endParaRPr lang="en-US" sz="900" u="sng" dirty="0">
+              <a:solidFill>
+                <a:srgbClr val="A371F7"/>
+              </a:solidFill>
+              <a:latin typeface="Calibri" pitchFamily="34" charset="0"/>
+              <a:ea typeface="Calibri" pitchFamily="34" charset="-122"/>
+              <a:cs typeface="Calibri" pitchFamily="34" charset="-120"/>
+            </a:endParaRPr>
+          </a:p>
+          <a:p>
+            <a:pPr algn="ctr"/>
+            <a:r>
+              <a:rPr lang="en-US" sz="900" dirty="0">
+                <a:hlinkClick r:id="rId6"/>
+              </a:rPr>
+              <a:t>https://github.com/mcropsey/api-mcp-demo</a:t>
+            </a:r>
+            <a:endParaRPr lang="en-US" sz="900" dirty="0"/>
+          </a:p>
+          <a:p>
+            <a:pPr algn="ctr"/>
             <a:endParaRPr lang="en-US" sz="900" dirty="0"/>
           </a:p>
         </p:txBody>
@@ -1551,7 +1572,7 @@
       <p:sp>
         <p:nvSpPr>
           <p:cNvPr id="19" name="Text 17">
-            <a:hlinkClick r:id="rId6"/>
+            <a:hlinkClick r:id="rId7"/>
           </p:cNvPr>
           <p:cNvSpPr/>
           <p:nvPr/>
@@ -1582,7 +1603,7 @@
                 <a:latin typeface="Calibri" pitchFamily="34" charset="0"/>
                 <a:ea typeface="Calibri" pitchFamily="34" charset="-122"/>
                 <a:cs typeface="Calibri" pitchFamily="34" charset="-120"/>
-                <a:hlinkClick r:id="rId6">
+                <a:hlinkClick r:id="rId7">
                   <a:extLst>
                     <a:ext uri="{A12FA001-AC4F-418D-AE19-62706E023703}">
                       <ahyp:hlinkClr xmlns:ahyp="http://schemas.microsoft.com/office/drawing/2018/hyperlinkcolor" val="tx"/>
@@ -1606,7 +1627,7 @@
                 <a:latin typeface="Calibri" pitchFamily="34" charset="0"/>
                 <a:ea typeface="Calibri" pitchFamily="34" charset="-122"/>
                 <a:cs typeface="Calibri" pitchFamily="34" charset="-120"/>
-                <a:hlinkClick r:id="rId6">
+                <a:hlinkClick r:id="rId7">
                   <a:extLst>
                     <a:ext uri="{A12FA001-AC4F-418D-AE19-62706E023703}">
                       <ahyp:hlinkClr xmlns:ahyp="http://schemas.microsoft.com/office/drawing/2018/hyperlinkcolor" val="tx"/>
